--- a/output_pptx/Amazing_Grace.pptx
+++ b/output_pptx/Amazing_Grace.pptx
@@ -3115,8 +3115,8 @@
         </p:nvSpPr>
         <p:spPr>
           <a:xfrm>
-            <a:off x="594360" y="1837944"/>
-            <a:ext cx="11002975" cy="685800"/>
+            <a:off x="640080" y="1650492"/>
+            <a:ext cx="10911535" cy="731520"/>
           </a:xfrm>
           <a:prstGeom prst="rect">
             <a:avLst/>
@@ -3131,7 +3131,7 @@
           <a:p>
             <a:pPr algn="ctr"/>
             <a:r>
-              <a:rPr sz="4400" b="1" i="0">
+              <a:rPr sz="4800" b="1" i="0">
                 <a:solidFill>
                   <a:srgbClr val="FFFFFF"/>
                 </a:solidFill>
@@ -3150,8 +3150,8 @@
         </p:nvSpPr>
         <p:spPr>
           <a:xfrm>
-            <a:off x="594360" y="2560320"/>
-            <a:ext cx="11002975" cy="384048"/>
+            <a:off x="640080" y="2418588"/>
+            <a:ext cx="10911535" cy="365760"/>
           </a:xfrm>
           <a:prstGeom prst="rect">
             <a:avLst/>
@@ -3168,7 +3168,7 @@
             <a:r>
               <a:rPr sz="2400" b="0" i="1">
                 <a:solidFill>
-                  <a:srgbClr val="B4B4B4"/>
+                  <a:srgbClr val="AAAAAA"/>
                 </a:solidFill>
                 <a:latin typeface="Arial"/>
               </a:rPr>
@@ -3185,8 +3185,8 @@
         </p:nvSpPr>
         <p:spPr>
           <a:xfrm>
-            <a:off x="594360" y="2980944"/>
-            <a:ext cx="11002975" cy="347472"/>
+            <a:off x="640080" y="2985516"/>
+            <a:ext cx="10911535" cy="731520"/>
           </a:xfrm>
           <a:prstGeom prst="rect">
             <a:avLst/>
@@ -3201,13 +3201,13 @@
           <a:p>
             <a:pPr algn="ctr"/>
             <a:r>
-              <a:rPr sz="2000" b="0" i="1">
-                <a:solidFill>
-                  <a:srgbClr val="8C8C8C"/>
+              <a:rPr sz="4800" b="1" i="0">
+                <a:solidFill>
+                  <a:srgbClr val="FFFFFF"/>
                 </a:solidFill>
                 <a:latin typeface="Arial"/>
               </a:rPr>
-              <a:t/>
+              <a:t>恵なりき</a:t>
             </a:r>
           </a:p>
         </p:txBody>
@@ -3220,8 +3220,8 @@
         </p:nvSpPr>
         <p:spPr>
           <a:xfrm>
-            <a:off x="594360" y="3529584"/>
-            <a:ext cx="11002975" cy="685800"/>
+            <a:off x="640080" y="3753612"/>
+            <a:ext cx="10911535" cy="365760"/>
           </a:xfrm>
           <a:prstGeom prst="rect">
             <a:avLst/>
@@ -3236,13 +3236,13 @@
           <a:p>
             <a:pPr algn="ctr"/>
             <a:r>
-              <a:rPr sz="4400" b="1" i="0">
-                <a:solidFill>
-                  <a:srgbClr val="FFFFFF"/>
+              <a:rPr sz="2400" b="0" i="1">
+                <a:solidFill>
+                  <a:srgbClr val="AAAAAA"/>
                 </a:solidFill>
                 <a:latin typeface="Arial"/>
               </a:rPr>
-              <a:t>恵なりき</a:t>
+              <a:t>megumi nariki</a:t>
             </a:r>
           </a:p>
         </p:txBody>
@@ -3255,8 +3255,8 @@
         </p:nvSpPr>
         <p:spPr>
           <a:xfrm>
-            <a:off x="594360" y="4251960"/>
-            <a:ext cx="11002975" cy="384048"/>
+            <a:off x="640080" y="4530852"/>
+            <a:ext cx="10911535" cy="310896"/>
           </a:xfrm>
           <a:prstGeom prst="rect">
             <a:avLst/>
@@ -3271,13 +3271,13 @@
           <a:p>
             <a:pPr algn="ctr"/>
             <a:r>
-              <a:rPr sz="2400" b="0" i="1">
-                <a:solidFill>
-                  <a:srgbClr val="B4B4B4"/>
+              <a:rPr sz="2000" b="0" i="1">
+                <a:solidFill>
+                  <a:srgbClr val="828282"/>
                 </a:solidFill>
                 <a:latin typeface="Arial"/>
               </a:rPr>
-              <a:t>megumi nariki</a:t>
+              <a:t>Sublime graça, que a um pecador</a:t>
             </a:r>
           </a:p>
         </p:txBody>
@@ -3290,8 +3290,8 @@
         </p:nvSpPr>
         <p:spPr>
           <a:xfrm>
-            <a:off x="594360" y="4672584"/>
-            <a:ext cx="11002975" cy="347472"/>
+            <a:off x="640080" y="4896612"/>
+            <a:ext cx="10911535" cy="310896"/>
           </a:xfrm>
           <a:prstGeom prst="rect">
             <a:avLst/>
@@ -3308,11 +3308,11 @@
             <a:r>
               <a:rPr sz="2000" b="0" i="1">
                 <a:solidFill>
-                  <a:srgbClr val="8C8C8C"/>
+                  <a:srgbClr val="828282"/>
                 </a:solidFill>
                 <a:latin typeface="Arial"/>
               </a:rPr>
-              <a:t/>
+              <a:t>Como eu, Jesus salvou</a:t>
             </a:r>
           </a:p>
         </p:txBody>
@@ -3351,8 +3351,8 @@
         </p:nvSpPr>
         <p:spPr>
           <a:xfrm>
-            <a:off x="594360" y="2258568"/>
-            <a:ext cx="11002975" cy="685800"/>
+            <a:off x="640080" y="2052828"/>
+            <a:ext cx="10911535" cy="731520"/>
           </a:xfrm>
           <a:prstGeom prst="rect">
             <a:avLst/>
@@ -3367,7 +3367,7 @@
           <a:p>
             <a:pPr algn="ctr"/>
             <a:r>
-              <a:rPr sz="4141" b="1" i="0">
+              <a:rPr sz="4500" b="1" i="0">
                 <a:solidFill>
                   <a:srgbClr val="FFFFFF"/>
                 </a:solidFill>
@@ -3386,8 +3386,8 @@
         </p:nvSpPr>
         <p:spPr>
           <a:xfrm>
-            <a:off x="594360" y="2980944"/>
-            <a:ext cx="11002975" cy="347472"/>
+            <a:off x="640080" y="2985516"/>
+            <a:ext cx="10911535" cy="731520"/>
           </a:xfrm>
           <a:prstGeom prst="rect">
             <a:avLst/>
@@ -3402,83 +3402,13 @@
           <a:p>
             <a:pPr algn="ctr"/>
             <a:r>
-              <a:rPr sz="2200" b="0" i="1">
-                <a:solidFill>
-                  <a:srgbClr val="8C8C8C"/>
-                </a:solidFill>
-                <a:latin typeface="Arial"/>
-              </a:rPr>
-              <a:t/>
-            </a:r>
-          </a:p>
-        </p:txBody>
-      </p:sp>
-      <p:sp>
-        <p:nvSpPr>
-          <p:cNvPr id="4" name="TextBox 3"/>
-          <p:cNvSpPr txBox="1"/>
-          <p:nvPr/>
-        </p:nvSpPr>
-        <p:spPr>
-          <a:xfrm>
-            <a:off x="594360" y="3529584"/>
-            <a:ext cx="11002975" cy="685800"/>
-          </a:xfrm>
-          <a:prstGeom prst="rect">
-            <a:avLst/>
-          </a:prstGeom>
-          <a:noFill/>
-        </p:spPr>
-        <p:txBody>
-          <a:bodyPr wrap="square">
-            <a:spAutoFit/>
-          </a:bodyPr>
-          <a:lstStyle/>
-          <a:p>
-            <a:pPr algn="ctr"/>
-            <a:r>
-              <a:rPr sz="4400" b="1" i="0">
+              <a:rPr sz="4800" b="1" i="0">
                 <a:solidFill>
                   <a:srgbClr val="FFFFFF"/>
                 </a:solidFill>
                 <a:latin typeface="Arial"/>
               </a:rPr>
               <a:t>E a graça nos levará para casa</a:t>
-            </a:r>
-          </a:p>
-        </p:txBody>
-      </p:sp>
-      <p:sp>
-        <p:nvSpPr>
-          <p:cNvPr id="5" name="TextBox 4"/>
-          <p:cNvSpPr txBox="1"/>
-          <p:nvPr/>
-        </p:nvSpPr>
-        <p:spPr>
-          <a:xfrm>
-            <a:off x="594360" y="4251960"/>
-            <a:ext cx="11002975" cy="347472"/>
-          </a:xfrm>
-          <a:prstGeom prst="rect">
-            <a:avLst/>
-          </a:prstGeom>
-          <a:noFill/>
-        </p:spPr>
-        <p:txBody>
-          <a:bodyPr wrap="square">
-            <a:spAutoFit/>
-          </a:bodyPr>
-          <a:lstStyle/>
-          <a:p>
-            <a:pPr algn="ctr"/>
-            <a:r>
-              <a:rPr sz="2200" b="0" i="1">
-                <a:solidFill>
-                  <a:srgbClr val="8C8C8C"/>
-                </a:solidFill>
-                <a:latin typeface="Arial"/>
-              </a:rPr>
-              <a:t/>
             </a:r>
           </a:p>
         </p:txBody>
@@ -3517,8 +3447,8 @@
         </p:nvSpPr>
         <p:spPr>
           <a:xfrm>
-            <a:off x="594360" y="2258568"/>
-            <a:ext cx="11002975" cy="685800"/>
+            <a:off x="640080" y="2052828"/>
+            <a:ext cx="10911535" cy="731520"/>
           </a:xfrm>
           <a:prstGeom prst="rect">
             <a:avLst/>
@@ -3533,7 +3463,7 @@
           <a:p>
             <a:pPr algn="ctr"/>
             <a:r>
-              <a:rPr sz="4400" b="1" i="0">
+              <a:rPr sz="4800" b="1" i="0">
                 <a:solidFill>
                   <a:srgbClr val="FFFFFF"/>
                 </a:solidFill>
@@ -3552,8 +3482,8 @@
         </p:nvSpPr>
         <p:spPr>
           <a:xfrm>
-            <a:off x="594360" y="2980944"/>
-            <a:ext cx="11002975" cy="347472"/>
+            <a:off x="640080" y="2985516"/>
+            <a:ext cx="10911535" cy="731520"/>
           </a:xfrm>
           <a:prstGeom prst="rect">
             <a:avLst/>
@@ -3568,83 +3498,13 @@
           <a:p>
             <a:pPr algn="ctr"/>
             <a:r>
-              <a:rPr sz="2200" b="0" i="1">
-                <a:solidFill>
-                  <a:srgbClr val="8C8C8C"/>
-                </a:solidFill>
-                <a:latin typeface="Arial"/>
-              </a:rPr>
-              <a:t/>
-            </a:r>
-          </a:p>
-        </p:txBody>
-      </p:sp>
-      <p:sp>
-        <p:nvSpPr>
-          <p:cNvPr id="4" name="TextBox 3"/>
-          <p:cNvSpPr txBox="1"/>
-          <p:nvPr/>
-        </p:nvSpPr>
-        <p:spPr>
-          <a:xfrm>
-            <a:off x="594360" y="3529584"/>
-            <a:ext cx="11002975" cy="685800"/>
-          </a:xfrm>
-          <a:prstGeom prst="rect">
-            <a:avLst/>
-          </a:prstGeom>
-          <a:noFill/>
-        </p:spPr>
-        <p:txBody>
-          <a:bodyPr wrap="square">
-            <a:spAutoFit/>
-          </a:bodyPr>
-          <a:lstStyle/>
-          <a:p>
-            <a:pPr algn="ctr"/>
-            <a:r>
-              <a:rPr sz="4400" b="1" i="0">
+              <a:rPr sz="4800" b="1" i="0">
                 <a:solidFill>
                   <a:srgbClr val="FFFFFF"/>
                 </a:solidFill>
                 <a:latin typeface="Arial"/>
               </a:rPr>
               <a:t>Resplandecer como o sol</a:t>
-            </a:r>
-          </a:p>
-        </p:txBody>
-      </p:sp>
-      <p:sp>
-        <p:nvSpPr>
-          <p:cNvPr id="5" name="TextBox 4"/>
-          <p:cNvSpPr txBox="1"/>
-          <p:nvPr/>
-        </p:nvSpPr>
-        <p:spPr>
-          <a:xfrm>
-            <a:off x="594360" y="4251960"/>
-            <a:ext cx="11002975" cy="347472"/>
-          </a:xfrm>
-          <a:prstGeom prst="rect">
-            <a:avLst/>
-          </a:prstGeom>
-          <a:noFill/>
-        </p:spPr>
-        <p:txBody>
-          <a:bodyPr wrap="square">
-            <a:spAutoFit/>
-          </a:bodyPr>
-          <a:lstStyle/>
-          <a:p>
-            <a:pPr algn="ctr"/>
-            <a:r>
-              <a:rPr sz="2200" b="0" i="1">
-                <a:solidFill>
-                  <a:srgbClr val="8C8C8C"/>
-                </a:solidFill>
-                <a:latin typeface="Arial"/>
-              </a:rPr>
-              <a:t/>
             </a:r>
           </a:p>
         </p:txBody>
@@ -3683,8 +3543,8 @@
         </p:nvSpPr>
         <p:spPr>
           <a:xfrm>
-            <a:off x="594360" y="2258568"/>
-            <a:ext cx="11002975" cy="685800"/>
+            <a:off x="640080" y="2052828"/>
+            <a:ext cx="10911535" cy="731520"/>
           </a:xfrm>
           <a:prstGeom prst="rect">
             <a:avLst/>
@@ -3699,7 +3559,7 @@
           <a:p>
             <a:pPr algn="ctr"/>
             <a:r>
-              <a:rPr sz="4400" b="1" i="0">
+              <a:rPr sz="4800" b="1" i="0">
                 <a:solidFill>
                   <a:srgbClr val="FFFFFF"/>
                 </a:solidFill>
@@ -3718,8 +3578,8 @@
         </p:nvSpPr>
         <p:spPr>
           <a:xfrm>
-            <a:off x="594360" y="2980944"/>
-            <a:ext cx="11002975" cy="347472"/>
+            <a:off x="640080" y="2985516"/>
+            <a:ext cx="10911535" cy="731520"/>
           </a:xfrm>
           <a:prstGeom prst="rect">
             <a:avLst/>
@@ -3734,83 +3594,13 @@
           <a:p>
             <a:pPr algn="ctr"/>
             <a:r>
-              <a:rPr sz="2200" b="0" i="1">
-                <a:solidFill>
-                  <a:srgbClr val="8C8C8C"/>
-                </a:solidFill>
-                <a:latin typeface="Arial"/>
-              </a:rPr>
-              <a:t/>
-            </a:r>
-          </a:p>
-        </p:txBody>
-      </p:sp>
-      <p:sp>
-        <p:nvSpPr>
-          <p:cNvPr id="4" name="TextBox 3"/>
-          <p:cNvSpPr txBox="1"/>
-          <p:nvPr/>
-        </p:nvSpPr>
-        <p:spPr>
-          <a:xfrm>
-            <a:off x="594360" y="3529584"/>
-            <a:ext cx="11002975" cy="685800"/>
-          </a:xfrm>
-          <a:prstGeom prst="rect">
-            <a:avLst/>
-          </a:prstGeom>
-          <a:noFill/>
-        </p:spPr>
-        <p:txBody>
-          <a:bodyPr wrap="square">
-            <a:spAutoFit/>
-          </a:bodyPr>
-          <a:lstStyle/>
-          <a:p>
-            <a:pPr algn="ctr"/>
-            <a:r>
-              <a:rPr sz="4400" b="1" i="0">
+              <a:rPr sz="4800" b="1" i="0">
                 <a:solidFill>
                   <a:srgbClr val="FFFFFF"/>
                 </a:solidFill>
                 <a:latin typeface="Arial"/>
               </a:rPr>
               <a:t>Para louvar a Deus</a:t>
-            </a:r>
-          </a:p>
-        </p:txBody>
-      </p:sp>
-      <p:sp>
-        <p:nvSpPr>
-          <p:cNvPr id="5" name="TextBox 4"/>
-          <p:cNvSpPr txBox="1"/>
-          <p:nvPr/>
-        </p:nvSpPr>
-        <p:spPr>
-          <a:xfrm>
-            <a:off x="594360" y="4251960"/>
-            <a:ext cx="11002975" cy="347472"/>
-          </a:xfrm>
-          <a:prstGeom prst="rect">
-            <a:avLst/>
-          </a:prstGeom>
-          <a:noFill/>
-        </p:spPr>
-        <p:txBody>
-          <a:bodyPr wrap="square">
-            <a:spAutoFit/>
-          </a:bodyPr>
-          <a:lstStyle/>
-          <a:p>
-            <a:pPr algn="ctr"/>
-            <a:r>
-              <a:rPr sz="2200" b="0" i="1">
-                <a:solidFill>
-                  <a:srgbClr val="8C8C8C"/>
-                </a:solidFill>
-                <a:latin typeface="Arial"/>
-              </a:rPr>
-              <a:t/>
             </a:r>
           </a:p>
         </p:txBody>
@@ -3849,8 +3639,8 @@
         </p:nvSpPr>
         <p:spPr>
           <a:xfrm>
-            <a:off x="594360" y="1837944"/>
-            <a:ext cx="11002975" cy="685800"/>
+            <a:off x="640080" y="1650492"/>
+            <a:ext cx="10911535" cy="731520"/>
           </a:xfrm>
           <a:prstGeom prst="rect">
             <a:avLst/>
@@ -3865,7 +3655,7 @@
           <a:p>
             <a:pPr algn="ctr"/>
             <a:r>
-              <a:rPr sz="4400" b="1" i="0">
+              <a:rPr sz="4800" b="1" i="0">
                 <a:solidFill>
                   <a:srgbClr val="FFFFFF"/>
                 </a:solidFill>
@@ -3884,8 +3674,8 @@
         </p:nvSpPr>
         <p:spPr>
           <a:xfrm>
-            <a:off x="594360" y="2560320"/>
-            <a:ext cx="11002975" cy="384048"/>
+            <a:off x="640080" y="2418588"/>
+            <a:ext cx="10911535" cy="365760"/>
           </a:xfrm>
           <a:prstGeom prst="rect">
             <a:avLst/>
@@ -3902,7 +3692,7 @@
             <a:r>
               <a:rPr sz="2400" b="0" i="1">
                 <a:solidFill>
-                  <a:srgbClr val="B4B4B4"/>
+                  <a:srgbClr val="AAAAAA"/>
                 </a:solidFill>
                 <a:latin typeface="Arial"/>
               </a:rPr>
@@ -3919,8 +3709,8 @@
         </p:nvSpPr>
         <p:spPr>
           <a:xfrm>
-            <a:off x="594360" y="2980944"/>
-            <a:ext cx="11002975" cy="347472"/>
+            <a:off x="640080" y="2985516"/>
+            <a:ext cx="10911535" cy="731520"/>
           </a:xfrm>
           <a:prstGeom prst="rect">
             <a:avLst/>
@@ -3935,13 +3725,13 @@
           <a:p>
             <a:pPr algn="ctr"/>
             <a:r>
-              <a:rPr sz="2000" b="0" i="1">
-                <a:solidFill>
-                  <a:srgbClr val="8C8C8C"/>
+              <a:rPr sz="4800" b="1" i="0">
+                <a:solidFill>
+                  <a:srgbClr val="FFFFFF"/>
                 </a:solidFill>
                 <a:latin typeface="Arial"/>
               </a:rPr>
-              <a:t/>
+              <a:t>知れる我に</a:t>
             </a:r>
           </a:p>
         </p:txBody>
@@ -3954,8 +3744,8 @@
         </p:nvSpPr>
         <p:spPr>
           <a:xfrm>
-            <a:off x="594360" y="3529584"/>
-            <a:ext cx="11002975" cy="685800"/>
+            <a:off x="640080" y="3753612"/>
+            <a:ext cx="10911535" cy="365760"/>
           </a:xfrm>
           <a:prstGeom prst="rect">
             <a:avLst/>
@@ -3970,13 +3760,13 @@
           <a:p>
             <a:pPr algn="ctr"/>
             <a:r>
-              <a:rPr sz="4400" b="1" i="0">
-                <a:solidFill>
-                  <a:srgbClr val="FFFFFF"/>
+              <a:rPr sz="2400" b="0" i="1">
+                <a:solidFill>
+                  <a:srgbClr val="AAAAAA"/>
                 </a:solidFill>
                 <a:latin typeface="Arial"/>
               </a:rPr>
-              <a:t>知れる我に</a:t>
+              <a:t>shireru ware ni</a:t>
             </a:r>
           </a:p>
         </p:txBody>
@@ -3989,8 +3779,8 @@
         </p:nvSpPr>
         <p:spPr>
           <a:xfrm>
-            <a:off x="594360" y="4251960"/>
-            <a:ext cx="11002975" cy="384048"/>
+            <a:off x="640080" y="4530852"/>
+            <a:ext cx="10911535" cy="310896"/>
           </a:xfrm>
           <a:prstGeom prst="rect">
             <a:avLst/>
@@ -4005,13 +3795,13 @@
           <a:p>
             <a:pPr algn="ctr"/>
             <a:r>
-              <a:rPr sz="2400" b="0" i="1">
-                <a:solidFill>
-                  <a:srgbClr val="B4B4B4"/>
+              <a:rPr sz="2000" b="0" i="1">
+                <a:solidFill>
+                  <a:srgbClr val="828282"/>
                 </a:solidFill>
                 <a:latin typeface="Arial"/>
               </a:rPr>
-              <a:t>shireru ware ni</a:t>
+              <a:t>Estava perdido e me encontrou</a:t>
             </a:r>
           </a:p>
         </p:txBody>
@@ -4024,8 +3814,8 @@
         </p:nvSpPr>
         <p:spPr>
           <a:xfrm>
-            <a:off x="594360" y="4672584"/>
-            <a:ext cx="11002975" cy="347472"/>
+            <a:off x="640080" y="4896612"/>
+            <a:ext cx="10911535" cy="310896"/>
           </a:xfrm>
           <a:prstGeom prst="rect">
             <a:avLst/>
@@ -4042,11 +3832,11 @@
             <a:r>
               <a:rPr sz="2000" b="0" i="1">
                 <a:solidFill>
-                  <a:srgbClr val="8C8C8C"/>
+                  <a:srgbClr val="828282"/>
                 </a:solidFill>
                 <a:latin typeface="Arial"/>
               </a:rPr>
-              <a:t/>
+              <a:t>Cego, mas agora vejo</a:t>
             </a:r>
           </a:p>
         </p:txBody>
@@ -4085,8 +3875,8 @@
         </p:nvSpPr>
         <p:spPr>
           <a:xfrm>
-            <a:off x="594360" y="1837944"/>
-            <a:ext cx="11002975" cy="685800"/>
+            <a:off x="640080" y="1650492"/>
+            <a:ext cx="10911535" cy="731520"/>
           </a:xfrm>
           <a:prstGeom prst="rect">
             <a:avLst/>
@@ -4101,7 +3891,7 @@
           <a:p>
             <a:pPr algn="ctr"/>
             <a:r>
-              <a:rPr sz="4400" b="1" i="0">
+              <a:rPr sz="4800" b="1" i="0">
                 <a:solidFill>
                   <a:srgbClr val="FFFFFF"/>
                 </a:solidFill>
@@ -4120,8 +3910,8 @@
         </p:nvSpPr>
         <p:spPr>
           <a:xfrm>
-            <a:off x="594360" y="2560320"/>
-            <a:ext cx="11002975" cy="384048"/>
+            <a:off x="640080" y="2418588"/>
+            <a:ext cx="10911535" cy="365760"/>
           </a:xfrm>
           <a:prstGeom prst="rect">
             <a:avLst/>
@@ -4138,7 +3928,7 @@
             <a:r>
               <a:rPr sz="2400" b="0" i="1">
                 <a:solidFill>
-                  <a:srgbClr val="B4B4B4"/>
+                  <a:srgbClr val="AAAAAA"/>
                 </a:solidFill>
                 <a:latin typeface="Arial"/>
               </a:rPr>
@@ -4155,8 +3945,8 @@
         </p:nvSpPr>
         <p:spPr>
           <a:xfrm>
-            <a:off x="594360" y="2980944"/>
-            <a:ext cx="11002975" cy="347472"/>
+            <a:off x="640080" y="2985516"/>
+            <a:ext cx="10911535" cy="731520"/>
           </a:xfrm>
           <a:prstGeom prst="rect">
             <a:avLst/>
@@ -4171,13 +3961,13 @@
           <a:p>
             <a:pPr algn="ctr"/>
             <a:r>
-              <a:rPr sz="2000" b="0" i="1">
-                <a:solidFill>
-                  <a:srgbClr val="8C8C8C"/>
+              <a:rPr sz="4800" b="1" i="0">
+                <a:solidFill>
+                  <a:srgbClr val="FFFFFF"/>
                 </a:solidFill>
                 <a:latin typeface="Arial"/>
               </a:rPr>
-              <a:t/>
+              <a:t>恐れ を 消し</a:t>
             </a:r>
           </a:p>
         </p:txBody>
@@ -4190,8 +3980,8 @@
         </p:nvSpPr>
         <p:spPr>
           <a:xfrm>
-            <a:off x="594360" y="3529584"/>
-            <a:ext cx="11002975" cy="685800"/>
+            <a:off x="640080" y="3753612"/>
+            <a:ext cx="10911535" cy="365760"/>
           </a:xfrm>
           <a:prstGeom prst="rect">
             <a:avLst/>
@@ -4206,13 +3996,13 @@
           <a:p>
             <a:pPr algn="ctr"/>
             <a:r>
-              <a:rPr sz="4400" b="1" i="0">
-                <a:solidFill>
-                  <a:srgbClr val="FFFFFF"/>
+              <a:rPr sz="2400" b="0" i="1">
+                <a:solidFill>
+                  <a:srgbClr val="AAAAAA"/>
                 </a:solidFill>
                 <a:latin typeface="Arial"/>
               </a:rPr>
-              <a:t>恐れ を 消し</a:t>
+              <a:t>osore wo keshi</a:t>
             </a:r>
           </a:p>
         </p:txBody>
@@ -4225,8 +4015,8 @@
         </p:nvSpPr>
         <p:spPr>
           <a:xfrm>
-            <a:off x="594360" y="4251960"/>
-            <a:ext cx="11002975" cy="384048"/>
+            <a:off x="640080" y="4530852"/>
+            <a:ext cx="10911535" cy="310896"/>
           </a:xfrm>
           <a:prstGeom prst="rect">
             <a:avLst/>
@@ -4241,13 +4031,13 @@
           <a:p>
             <a:pPr algn="ctr"/>
             <a:r>
-              <a:rPr sz="2400" b="0" i="1">
-                <a:solidFill>
-                  <a:srgbClr val="B4B4B4"/>
+              <a:rPr sz="2000" b="0" i="1">
+                <a:solidFill>
+                  <a:srgbClr val="828282"/>
                 </a:solidFill>
                 <a:latin typeface="Arial"/>
               </a:rPr>
-              <a:t>osore wo keshi</a:t>
+              <a:t>Foi a graça que meu coração</a:t>
             </a:r>
           </a:p>
         </p:txBody>
@@ -4260,8 +4050,8 @@
         </p:nvSpPr>
         <p:spPr>
           <a:xfrm>
-            <a:off x="594360" y="4672584"/>
-            <a:ext cx="11002975" cy="347472"/>
+            <a:off x="640080" y="4896612"/>
+            <a:ext cx="10911535" cy="310896"/>
           </a:xfrm>
           <a:prstGeom prst="rect">
             <a:avLst/>
@@ -4278,11 +4068,11 @@
             <a:r>
               <a:rPr sz="2000" b="0" i="1">
                 <a:solidFill>
-                  <a:srgbClr val="8C8C8C"/>
+                  <a:srgbClr val="828282"/>
                 </a:solidFill>
                 <a:latin typeface="Arial"/>
               </a:rPr>
-              <a:t/>
+              <a:t>Ensinou a reverenciar</a:t>
             </a:r>
           </a:p>
         </p:txBody>
@@ -4321,8 +4111,8 @@
         </p:nvSpPr>
         <p:spPr>
           <a:xfrm>
-            <a:off x="594360" y="1837944"/>
-            <a:ext cx="11002975" cy="685800"/>
+            <a:off x="640080" y="1650492"/>
+            <a:ext cx="10911535" cy="731520"/>
           </a:xfrm>
           <a:prstGeom prst="rect">
             <a:avLst/>
@@ -4337,7 +4127,7 @@
           <a:p>
             <a:pPr algn="ctr"/>
             <a:r>
-              <a:rPr sz="4400" b="1" i="0">
+              <a:rPr sz="4800" b="1" i="0">
                 <a:solidFill>
                   <a:srgbClr val="FFFFFF"/>
                 </a:solidFill>
@@ -4356,8 +4146,8 @@
         </p:nvSpPr>
         <p:spPr>
           <a:xfrm>
-            <a:off x="594360" y="2560320"/>
-            <a:ext cx="11002975" cy="384048"/>
+            <a:off x="640080" y="2418588"/>
+            <a:ext cx="10911535" cy="365760"/>
           </a:xfrm>
           <a:prstGeom prst="rect">
             <a:avLst/>
@@ -4374,7 +4164,7 @@
             <a:r>
               <a:rPr sz="2400" b="0" i="1">
                 <a:solidFill>
-                  <a:srgbClr val="B4B4B4"/>
+                  <a:srgbClr val="AAAAAA"/>
                 </a:solidFill>
                 <a:latin typeface="Arial"/>
               </a:rPr>
@@ -4391,8 +4181,8 @@
         </p:nvSpPr>
         <p:spPr>
           <a:xfrm>
-            <a:off x="594360" y="2980944"/>
-            <a:ext cx="11002975" cy="347472"/>
+            <a:off x="640080" y="2985516"/>
+            <a:ext cx="10911535" cy="731520"/>
           </a:xfrm>
           <a:prstGeom prst="rect">
             <a:avLst/>
@@ -4407,13 +4197,13 @@
           <a:p>
             <a:pPr algn="ctr"/>
             <a:r>
-              <a:rPr sz="2000" b="0" i="1">
-                <a:solidFill>
-                  <a:srgbClr val="8C8C8C"/>
+              <a:rPr sz="4800" b="1" i="0">
+                <a:solidFill>
+                  <a:srgbClr val="FFFFFF"/>
                 </a:solidFill>
                 <a:latin typeface="Arial"/>
               </a:rPr>
-              <a:t/>
+              <a:t>起こさせたり</a:t>
             </a:r>
           </a:p>
         </p:txBody>
@@ -4426,8 +4216,8 @@
         </p:nvSpPr>
         <p:spPr>
           <a:xfrm>
-            <a:off x="594360" y="3529584"/>
-            <a:ext cx="11002975" cy="685800"/>
+            <a:off x="640080" y="3753612"/>
+            <a:ext cx="10911535" cy="365760"/>
           </a:xfrm>
           <a:prstGeom prst="rect">
             <a:avLst/>
@@ -4442,13 +4232,13 @@
           <a:p>
             <a:pPr algn="ctr"/>
             <a:r>
-              <a:rPr sz="4400" b="1" i="0">
-                <a:solidFill>
-                  <a:srgbClr val="FFFFFF"/>
+              <a:rPr sz="2400" b="0" i="1">
+                <a:solidFill>
+                  <a:srgbClr val="AAAAAA"/>
                 </a:solidFill>
                 <a:latin typeface="Arial"/>
               </a:rPr>
-              <a:t>起こさせたり</a:t>
+              <a:t>oko-sase tari</a:t>
             </a:r>
           </a:p>
         </p:txBody>
@@ -4461,8 +4251,8 @@
         </p:nvSpPr>
         <p:spPr>
           <a:xfrm>
-            <a:off x="594360" y="4251960"/>
-            <a:ext cx="11002975" cy="384048"/>
+            <a:off x="640080" y="4530852"/>
+            <a:ext cx="10911535" cy="310896"/>
           </a:xfrm>
           <a:prstGeom prst="rect">
             <a:avLst/>
@@ -4477,13 +4267,13 @@
           <a:p>
             <a:pPr algn="ctr"/>
             <a:r>
-              <a:rPr sz="2400" b="0" i="1">
-                <a:solidFill>
-                  <a:srgbClr val="B4B4B4"/>
+              <a:rPr sz="2000" b="0" i="1">
+                <a:solidFill>
+                  <a:srgbClr val="828282"/>
                 </a:solidFill>
                 <a:latin typeface="Arial"/>
               </a:rPr>
-              <a:t>oko-sase tari</a:t>
+              <a:t>E a própria graça me deu</a:t>
             </a:r>
           </a:p>
         </p:txBody>
@@ -4496,8 +4286,8 @@
         </p:nvSpPr>
         <p:spPr>
           <a:xfrm>
-            <a:off x="594360" y="4672584"/>
-            <a:ext cx="11002975" cy="347472"/>
+            <a:off x="640080" y="4896612"/>
+            <a:ext cx="10911535" cy="310896"/>
           </a:xfrm>
           <a:prstGeom prst="rect">
             <a:avLst/>
@@ -4514,11 +4304,11 @@
             <a:r>
               <a:rPr sz="2000" b="0" i="1">
                 <a:solidFill>
-                  <a:srgbClr val="8C8C8C"/>
+                  <a:srgbClr val="828282"/>
                 </a:solidFill>
                 <a:latin typeface="Arial"/>
               </a:rPr>
-              <a:t/>
+              <a:t>Em Cristo paz e amor</a:t>
             </a:r>
           </a:p>
         </p:txBody>
@@ -4557,8 +4347,8 @@
         </p:nvSpPr>
         <p:spPr>
           <a:xfrm>
-            <a:off x="594360" y="2258568"/>
-            <a:ext cx="11002975" cy="685800"/>
+            <a:off x="640080" y="2052828"/>
+            <a:ext cx="10911535" cy="731520"/>
           </a:xfrm>
           <a:prstGeom prst="rect">
             <a:avLst/>
@@ -4573,7 +4363,7 @@
           <a:p>
             <a:pPr algn="ctr"/>
             <a:r>
-              <a:rPr sz="4400" b="1" i="0">
+              <a:rPr sz="4800" b="1" i="0">
                 <a:solidFill>
                   <a:srgbClr val="FFFFFF"/>
                 </a:solidFill>
@@ -4592,8 +4382,8 @@
         </p:nvSpPr>
         <p:spPr>
           <a:xfrm>
-            <a:off x="594360" y="2980944"/>
-            <a:ext cx="11002975" cy="347472"/>
+            <a:off x="640080" y="2985516"/>
+            <a:ext cx="10911535" cy="731520"/>
           </a:xfrm>
           <a:prstGeom prst="rect">
             <a:avLst/>
@@ -4608,83 +4398,13 @@
           <a:p>
             <a:pPr algn="ctr"/>
             <a:r>
-              <a:rPr sz="2200" b="0" i="1">
-                <a:solidFill>
-                  <a:srgbClr val="8C8C8C"/>
-                </a:solidFill>
-                <a:latin typeface="Arial"/>
-              </a:rPr>
-              <a:t/>
-            </a:r>
-          </a:p>
-        </p:txBody>
-      </p:sp>
-      <p:sp>
-        <p:nvSpPr>
-          <p:cNvPr id="4" name="TextBox 3"/>
-          <p:cNvSpPr txBox="1"/>
-          <p:nvPr/>
-        </p:nvSpPr>
-        <p:spPr>
-          <a:xfrm>
-            <a:off x="594360" y="3529584"/>
-            <a:ext cx="11002975" cy="685800"/>
-          </a:xfrm>
-          <a:prstGeom prst="rect">
-            <a:avLst/>
-          </a:prstGeom>
-          <a:noFill/>
-        </p:spPr>
-        <p:txBody>
-          <a:bodyPr wrap="square">
-            <a:spAutoFit/>
-          </a:bodyPr>
-          <a:lstStyle/>
-          <a:p>
-            <a:pPr algn="ctr"/>
-            <a:r>
-              <a:rPr sz="4400" b="1" i="0">
+              <a:rPr sz="4800" b="1" i="0">
                 <a:solidFill>
                   <a:srgbClr val="FFFFFF"/>
                 </a:solidFill>
                 <a:latin typeface="Arial"/>
               </a:rPr>
               <a:t>Como eu, Jesus salvou</a:t>
-            </a:r>
-          </a:p>
-        </p:txBody>
-      </p:sp>
-      <p:sp>
-        <p:nvSpPr>
-          <p:cNvPr id="5" name="TextBox 4"/>
-          <p:cNvSpPr txBox="1"/>
-          <p:nvPr/>
-        </p:nvSpPr>
-        <p:spPr>
-          <a:xfrm>
-            <a:off x="594360" y="4251960"/>
-            <a:ext cx="11002975" cy="347472"/>
-          </a:xfrm>
-          <a:prstGeom prst="rect">
-            <a:avLst/>
-          </a:prstGeom>
-          <a:noFill/>
-        </p:spPr>
-        <p:txBody>
-          <a:bodyPr wrap="square">
-            <a:spAutoFit/>
-          </a:bodyPr>
-          <a:lstStyle/>
-          <a:p>
-            <a:pPr algn="ctr"/>
-            <a:r>
-              <a:rPr sz="2200" b="0" i="1">
-                <a:solidFill>
-                  <a:srgbClr val="8C8C8C"/>
-                </a:solidFill>
-                <a:latin typeface="Arial"/>
-              </a:rPr>
-              <a:t/>
             </a:r>
           </a:p>
         </p:txBody>
@@ -4723,8 +4443,8 @@
         </p:nvSpPr>
         <p:spPr>
           <a:xfrm>
-            <a:off x="594360" y="2258568"/>
-            <a:ext cx="11002975" cy="685800"/>
+            <a:off x="640080" y="2052828"/>
+            <a:ext cx="10911535" cy="731520"/>
           </a:xfrm>
           <a:prstGeom prst="rect">
             <a:avLst/>
@@ -4739,7 +4459,7 @@
           <a:p>
             <a:pPr algn="ctr"/>
             <a:r>
-              <a:rPr sz="4400" b="1" i="0">
+              <a:rPr sz="4800" b="1" i="0">
                 <a:solidFill>
                   <a:srgbClr val="FFFFFF"/>
                 </a:solidFill>
@@ -4758,8 +4478,8 @@
         </p:nvSpPr>
         <p:spPr>
           <a:xfrm>
-            <a:off x="594360" y="2980944"/>
-            <a:ext cx="11002975" cy="347472"/>
+            <a:off x="640080" y="2985516"/>
+            <a:ext cx="10911535" cy="731520"/>
           </a:xfrm>
           <a:prstGeom prst="rect">
             <a:avLst/>
@@ -4774,83 +4494,13 @@
           <a:p>
             <a:pPr algn="ctr"/>
             <a:r>
-              <a:rPr sz="2200" b="0" i="1">
-                <a:solidFill>
-                  <a:srgbClr val="8C8C8C"/>
-                </a:solidFill>
-                <a:latin typeface="Arial"/>
-              </a:rPr>
-              <a:t/>
-            </a:r>
-          </a:p>
-        </p:txBody>
-      </p:sp>
-      <p:sp>
-        <p:nvSpPr>
-          <p:cNvPr id="4" name="TextBox 3"/>
-          <p:cNvSpPr txBox="1"/>
-          <p:nvPr/>
-        </p:nvSpPr>
-        <p:spPr>
-          <a:xfrm>
-            <a:off x="594360" y="3529584"/>
-            <a:ext cx="11002975" cy="685800"/>
-          </a:xfrm>
-          <a:prstGeom prst="rect">
-            <a:avLst/>
-          </a:prstGeom>
-          <a:noFill/>
-        </p:spPr>
-        <p:txBody>
-          <a:bodyPr wrap="square">
-            <a:spAutoFit/>
-          </a:bodyPr>
-          <a:lstStyle/>
-          <a:p>
-            <a:pPr algn="ctr"/>
-            <a:r>
-              <a:rPr sz="4400" b="1" i="0">
+              <a:rPr sz="4800" b="1" i="0">
                 <a:solidFill>
                   <a:srgbClr val="FFFFFF"/>
                 </a:solidFill>
                 <a:latin typeface="Arial"/>
               </a:rPr>
               <a:t>Cego, mas agora vejo</a:t>
-            </a:r>
-          </a:p>
-        </p:txBody>
-      </p:sp>
-      <p:sp>
-        <p:nvSpPr>
-          <p:cNvPr id="5" name="TextBox 4"/>
-          <p:cNvSpPr txBox="1"/>
-          <p:nvPr/>
-        </p:nvSpPr>
-        <p:spPr>
-          <a:xfrm>
-            <a:off x="594360" y="4251960"/>
-            <a:ext cx="11002975" cy="347472"/>
-          </a:xfrm>
-          <a:prstGeom prst="rect">
-            <a:avLst/>
-          </a:prstGeom>
-          <a:noFill/>
-        </p:spPr>
-        <p:txBody>
-          <a:bodyPr wrap="square">
-            <a:spAutoFit/>
-          </a:bodyPr>
-          <a:lstStyle/>
-          <a:p>
-            <a:pPr algn="ctr"/>
-            <a:r>
-              <a:rPr sz="2200" b="0" i="1">
-                <a:solidFill>
-                  <a:srgbClr val="8C8C8C"/>
-                </a:solidFill>
-                <a:latin typeface="Arial"/>
-              </a:rPr>
-              <a:t/>
             </a:r>
           </a:p>
         </p:txBody>
@@ -4889,8 +4539,8 @@
         </p:nvSpPr>
         <p:spPr>
           <a:xfrm>
-            <a:off x="594360" y="2258568"/>
-            <a:ext cx="11002975" cy="685800"/>
+            <a:off x="640080" y="2052828"/>
+            <a:ext cx="10911535" cy="731520"/>
           </a:xfrm>
           <a:prstGeom prst="rect">
             <a:avLst/>
@@ -4905,7 +4555,7 @@
           <a:p>
             <a:pPr algn="ctr"/>
             <a:r>
-              <a:rPr sz="4400" b="1" i="0">
+              <a:rPr sz="4800" b="1" i="0">
                 <a:solidFill>
                   <a:srgbClr val="FFFFFF"/>
                 </a:solidFill>
@@ -4924,8 +4574,8 @@
         </p:nvSpPr>
         <p:spPr>
           <a:xfrm>
-            <a:off x="594360" y="2980944"/>
-            <a:ext cx="11002975" cy="347472"/>
+            <a:off x="640080" y="2985516"/>
+            <a:ext cx="10911535" cy="731520"/>
           </a:xfrm>
           <a:prstGeom prst="rect">
             <a:avLst/>
@@ -4940,13 +4590,13 @@
           <a:p>
             <a:pPr algn="ctr"/>
             <a:r>
-              <a:rPr sz="2200" b="0" i="1">
-                <a:solidFill>
-                  <a:srgbClr val="8C8C8C"/>
+              <a:rPr sz="4800" b="1" i="0">
+                <a:solidFill>
+                  <a:srgbClr val="FFFFFF"/>
                 </a:solidFill>
                 <a:latin typeface="Arial"/>
               </a:rPr>
-              <a:t/>
+              <a:t>Ensinou a reverenciar</a:t>
             </a:r>
           </a:p>
         </p:txBody>
@@ -4959,8 +4609,8 @@
         </p:nvSpPr>
         <p:spPr>
           <a:xfrm>
-            <a:off x="594360" y="3529584"/>
-            <a:ext cx="11002975" cy="685800"/>
+            <a:off x="640080" y="4128516"/>
+            <a:ext cx="10911535" cy="310896"/>
           </a:xfrm>
           <a:prstGeom prst="rect">
             <a:avLst/>
@@ -4975,13 +4625,13 @@
           <a:p>
             <a:pPr algn="ctr"/>
             <a:r>
-              <a:rPr sz="4400" b="1" i="0">
-                <a:solidFill>
-                  <a:srgbClr val="FFFFFF"/>
+              <a:rPr sz="2000" b="0" i="0">
+                <a:solidFill>
+                  <a:srgbClr val="828282"/>
                 </a:solidFill>
                 <a:latin typeface="Arial"/>
               </a:rPr>
-              <a:t>Ensinou a reverenciar</a:t>
+              <a:t>恵  我が身の、</a:t>
             </a:r>
           </a:p>
         </p:txBody>
@@ -4994,8 +4644,8 @@
         </p:nvSpPr>
         <p:spPr>
           <a:xfrm>
-            <a:off x="594360" y="4251960"/>
-            <a:ext cx="11002975" cy="347472"/>
+            <a:off x="640080" y="4494276"/>
+            <a:ext cx="10911535" cy="310896"/>
           </a:xfrm>
           <a:prstGeom prst="rect">
             <a:avLst/>
@@ -5010,13 +4660,13 @@
           <a:p>
             <a:pPr algn="ctr"/>
             <a:r>
-              <a:rPr sz="2200" b="0" i="1">
-                <a:solidFill>
-                  <a:srgbClr val="8C8C8C"/>
+              <a:rPr sz="2000" b="0" i="0">
+                <a:solidFill>
+                  <a:srgbClr val="828282"/>
                 </a:solidFill>
                 <a:latin typeface="Arial"/>
               </a:rPr>
-              <a:t/>
+              <a:t>恐れ を 消し</a:t>
             </a:r>
           </a:p>
         </p:txBody>
@@ -5055,8 +4705,8 @@
         </p:nvSpPr>
         <p:spPr>
           <a:xfrm>
-            <a:off x="594360" y="2258568"/>
-            <a:ext cx="11002975" cy="685800"/>
+            <a:off x="640080" y="2052828"/>
+            <a:ext cx="10911535" cy="731520"/>
           </a:xfrm>
           <a:prstGeom prst="rect">
             <a:avLst/>
@@ -5071,7 +4721,7 @@
           <a:p>
             <a:pPr algn="ctr"/>
             <a:r>
-              <a:rPr sz="4400" b="1" i="0">
+              <a:rPr sz="4800" b="1" i="0">
                 <a:solidFill>
                   <a:srgbClr val="FFFFFF"/>
                 </a:solidFill>
@@ -5090,8 +4740,8 @@
         </p:nvSpPr>
         <p:spPr>
           <a:xfrm>
-            <a:off x="594360" y="2980944"/>
-            <a:ext cx="11002975" cy="347472"/>
+            <a:off x="640080" y="2985516"/>
+            <a:ext cx="10911535" cy="731520"/>
           </a:xfrm>
           <a:prstGeom prst="rect">
             <a:avLst/>
@@ -5106,13 +4756,13 @@
           <a:p>
             <a:pPr algn="ctr"/>
             <a:r>
-              <a:rPr sz="2200" b="0" i="1">
-                <a:solidFill>
-                  <a:srgbClr val="8C8C8C"/>
+              <a:rPr sz="4800" b="1" i="0">
+                <a:solidFill>
+                  <a:srgbClr val="FFFFFF"/>
                 </a:solidFill>
                 <a:latin typeface="Arial"/>
               </a:rPr>
-              <a:t/>
+              <a:t>Em Cristo paz e amor</a:t>
             </a:r>
           </a:p>
         </p:txBody>
@@ -5125,8 +4775,8 @@
         </p:nvSpPr>
         <p:spPr>
           <a:xfrm>
-            <a:off x="594360" y="3529584"/>
-            <a:ext cx="11002975" cy="685800"/>
+            <a:off x="640080" y="4128516"/>
+            <a:ext cx="10911535" cy="310896"/>
           </a:xfrm>
           <a:prstGeom prst="rect">
             <a:avLst/>
@@ -5141,13 +4791,13 @@
           <a:p>
             <a:pPr algn="ctr"/>
             <a:r>
-              <a:rPr sz="4400" b="1" i="0">
-                <a:solidFill>
-                  <a:srgbClr val="FFFFFF"/>
+              <a:rPr sz="2000" b="0" i="0">
+                <a:solidFill>
+                  <a:srgbClr val="828282"/>
                 </a:solidFill>
                 <a:latin typeface="Arial"/>
               </a:rPr>
-              <a:t>Em Cristo paz e amor</a:t>
+              <a:t>まかするこころを、</a:t>
             </a:r>
           </a:p>
         </p:txBody>
@@ -5160,8 +4810,8 @@
         </p:nvSpPr>
         <p:spPr>
           <a:xfrm>
-            <a:off x="594360" y="4251960"/>
-            <a:ext cx="11002975" cy="347472"/>
+            <a:off x="640080" y="4494276"/>
+            <a:ext cx="10911535" cy="310896"/>
           </a:xfrm>
           <a:prstGeom prst="rect">
             <a:avLst/>
@@ -5176,13 +4826,13 @@
           <a:p>
             <a:pPr algn="ctr"/>
             <a:r>
-              <a:rPr sz="2200" b="0" i="1">
-                <a:solidFill>
-                  <a:srgbClr val="8C8C8C"/>
+              <a:rPr sz="2000" b="0" i="0">
+                <a:solidFill>
+                  <a:srgbClr val="828282"/>
                 </a:solidFill>
                 <a:latin typeface="Arial"/>
               </a:rPr>
-              <a:t/>
+              <a:t>起こさせたり</a:t>
             </a:r>
           </a:p>
         </p:txBody>
@@ -5221,8 +4871,8 @@
         </p:nvSpPr>
         <p:spPr>
           <a:xfrm>
-            <a:off x="594360" y="2258568"/>
-            <a:ext cx="11002975" cy="685800"/>
+            <a:off x="640080" y="2052828"/>
+            <a:ext cx="10911535" cy="731520"/>
           </a:xfrm>
           <a:prstGeom prst="rect">
             <a:avLst/>
@@ -5237,7 +4887,7 @@
           <a:p>
             <a:pPr algn="ctr"/>
             <a:r>
-              <a:rPr sz="3200" b="1" i="0">
+              <a:rPr sz="3400" b="1" i="0">
                 <a:solidFill>
                   <a:srgbClr val="FFFFFF"/>
                 </a:solidFill>
@@ -5256,8 +4906,8 @@
         </p:nvSpPr>
         <p:spPr>
           <a:xfrm>
-            <a:off x="594360" y="2980944"/>
-            <a:ext cx="11002975" cy="347472"/>
+            <a:off x="640080" y="2985516"/>
+            <a:ext cx="10911535" cy="731520"/>
           </a:xfrm>
           <a:prstGeom prst="rect">
             <a:avLst/>
@@ -5272,83 +4922,13 @@
           <a:p>
             <a:pPr algn="ctr"/>
             <a:r>
-              <a:rPr sz="2200" b="0" i="1">
-                <a:solidFill>
-                  <a:srgbClr val="8C8C8C"/>
-                </a:solidFill>
-                <a:latin typeface="Arial"/>
-              </a:rPr>
-              <a:t/>
-            </a:r>
-          </a:p>
-        </p:txBody>
-      </p:sp>
-      <p:sp>
-        <p:nvSpPr>
-          <p:cNvPr id="4" name="TextBox 3"/>
-          <p:cNvSpPr txBox="1"/>
-          <p:nvPr/>
-        </p:nvSpPr>
-        <p:spPr>
-          <a:xfrm>
-            <a:off x="594360" y="3529584"/>
-            <a:ext cx="11002975" cy="685800"/>
-          </a:xfrm>
-          <a:prstGeom prst="rect">
-            <a:avLst/>
-          </a:prstGeom>
-          <a:noFill/>
-        </p:spPr>
-        <p:txBody>
-          <a:bodyPr wrap="square">
-            <a:spAutoFit/>
-          </a:bodyPr>
-          <a:lstStyle/>
-          <a:p>
-            <a:pPr algn="ctr"/>
-            <a:r>
-              <a:rPr sz="4400" b="1" i="0">
+              <a:rPr sz="4800" b="1" i="0">
                 <a:solidFill>
                   <a:srgbClr val="FFFFFF"/>
                 </a:solidFill>
                 <a:latin typeface="Arial"/>
               </a:rPr>
               <a:t>Já tenho chegado até aqui</a:t>
-            </a:r>
-          </a:p>
-        </p:txBody>
-      </p:sp>
-      <p:sp>
-        <p:nvSpPr>
-          <p:cNvPr id="5" name="TextBox 4"/>
-          <p:cNvSpPr txBox="1"/>
-          <p:nvPr/>
-        </p:nvSpPr>
-        <p:spPr>
-          <a:xfrm>
-            <a:off x="594360" y="4251960"/>
-            <a:ext cx="11002975" cy="347472"/>
-          </a:xfrm>
-          <a:prstGeom prst="rect">
-            <a:avLst/>
-          </a:prstGeom>
-          <a:noFill/>
-        </p:spPr>
-        <p:txBody>
-          <a:bodyPr wrap="square">
-            <a:spAutoFit/>
-          </a:bodyPr>
-          <a:lstStyle/>
-          <a:p>
-            <a:pPr algn="ctr"/>
-            <a:r>
-              <a:rPr sz="2200" b="0" i="1">
-                <a:solidFill>
-                  <a:srgbClr val="8C8C8C"/>
-                </a:solidFill>
-                <a:latin typeface="Arial"/>
-              </a:rPr>
-              <a:t/>
             </a:r>
           </a:p>
         </p:txBody>

--- a/output_pptx/Amazing_Grace.pptx
+++ b/output_pptx/Amazing_Grace.pptx
@@ -3413,6 +3413,76 @@
           </a:p>
         </p:txBody>
       </p:sp>
+      <p:sp>
+        <p:nvSpPr>
+          <p:cNvPr id="4" name="TextBox 3"/>
+          <p:cNvSpPr txBox="1"/>
+          <p:nvPr/>
+        </p:nvSpPr>
+        <p:spPr>
+          <a:xfrm>
+            <a:off x="640080" y="4128516"/>
+            <a:ext cx="10911535" cy="310896"/>
+          </a:xfrm>
+          <a:prstGeom prst="rect">
+            <a:avLst/>
+          </a:prstGeom>
+          <a:noFill/>
+        </p:spPr>
+        <p:txBody>
+          <a:bodyPr wrap="square">
+            <a:spAutoFit/>
+          </a:bodyPr>
+          <a:lstStyle/>
+          <a:p>
+            <a:pPr algn="ctr"/>
+            <a:r>
+              <a:rPr sz="2000" b="0" i="0">
+                <a:solidFill>
+                  <a:srgbClr val="828282"/>
+                </a:solidFill>
+                <a:latin typeface="Arial"/>
+              </a:rPr>
+              <a:t>恵みが私たちを安全に導いた</a:t>
+            </a:r>
+          </a:p>
+        </p:txBody>
+      </p:sp>
+      <p:sp>
+        <p:nvSpPr>
+          <p:cNvPr id="5" name="TextBox 4"/>
+          <p:cNvSpPr txBox="1"/>
+          <p:nvPr/>
+        </p:nvSpPr>
+        <p:spPr>
+          <a:xfrm>
+            <a:off x="640080" y="4494276"/>
+            <a:ext cx="10911535" cy="310896"/>
+          </a:xfrm>
+          <a:prstGeom prst="rect">
+            <a:avLst/>
+          </a:prstGeom>
+          <a:noFill/>
+        </p:spPr>
+        <p:txBody>
+          <a:bodyPr wrap="square">
+            <a:spAutoFit/>
+          </a:bodyPr>
+          <a:lstStyle/>
+          <a:p>
+            <a:pPr algn="ctr"/>
+            <a:r>
+              <a:rPr sz="2000" b="0" i="0">
+                <a:solidFill>
+                  <a:srgbClr val="828282"/>
+                </a:solidFill>
+                <a:latin typeface="Arial"/>
+              </a:rPr>
+              <a:t>そして恵みは私たちを家へ連れていく</a:t>
+            </a:r>
+          </a:p>
+        </p:txBody>
+      </p:sp>
     </p:spTree>
   </p:cSld>
   <p:clrMapOvr>
@@ -3509,6 +3579,76 @@
           </a:p>
         </p:txBody>
       </p:sp>
+      <p:sp>
+        <p:nvSpPr>
+          <p:cNvPr id="4" name="TextBox 3"/>
+          <p:cNvSpPr txBox="1"/>
+          <p:nvPr/>
+        </p:nvSpPr>
+        <p:spPr>
+          <a:xfrm>
+            <a:off x="640080" y="4128516"/>
+            <a:ext cx="10911535" cy="310896"/>
+          </a:xfrm>
+          <a:prstGeom prst="rect">
+            <a:avLst/>
+          </a:prstGeom>
+          <a:noFill/>
+        </p:spPr>
+        <p:txBody>
+          <a:bodyPr wrap="square">
+            <a:spAutoFit/>
+          </a:bodyPr>
+          <a:lstStyle/>
+          <a:p>
+            <a:pPr algn="ctr"/>
+            <a:r>
+              <a:rPr sz="2000" b="0" i="0">
+                <a:solidFill>
+                  <a:srgbClr val="828282"/>
+                </a:solidFill>
+                <a:latin typeface="Arial"/>
+              </a:rPr>
+              <a:t>そこで一万年の時が</a:t>
+            </a:r>
+          </a:p>
+        </p:txBody>
+      </p:sp>
+      <p:sp>
+        <p:nvSpPr>
+          <p:cNvPr id="5" name="TextBox 4"/>
+          <p:cNvSpPr txBox="1"/>
+          <p:nvPr/>
+        </p:nvSpPr>
+        <p:spPr>
+          <a:xfrm>
+            <a:off x="640080" y="4494276"/>
+            <a:ext cx="10911535" cy="310896"/>
+          </a:xfrm>
+          <a:prstGeom prst="rect">
+            <a:avLst/>
+          </a:prstGeom>
+          <a:noFill/>
+        </p:spPr>
+        <p:txBody>
+          <a:bodyPr wrap="square">
+            <a:spAutoFit/>
+          </a:bodyPr>
+          <a:lstStyle/>
+          <a:p>
+            <a:pPr algn="ctr"/>
+            <a:r>
+              <a:rPr sz="2000" b="0" i="0">
+                <a:solidFill>
+                  <a:srgbClr val="828282"/>
+                </a:solidFill>
+                <a:latin typeface="Arial"/>
+              </a:rPr>
+              <a:t>太陽のように輝く</a:t>
+            </a:r>
+          </a:p>
+        </p:txBody>
+      </p:sp>
     </p:spTree>
   </p:cSld>
   <p:clrMapOvr>
@@ -3605,6 +3745,76 @@
           </a:p>
         </p:txBody>
       </p:sp>
+      <p:sp>
+        <p:nvSpPr>
+          <p:cNvPr id="4" name="TextBox 3"/>
+          <p:cNvSpPr txBox="1"/>
+          <p:nvPr/>
+        </p:nvSpPr>
+        <p:spPr>
+          <a:xfrm>
+            <a:off x="640080" y="4128516"/>
+            <a:ext cx="10911535" cy="310896"/>
+          </a:xfrm>
+          <a:prstGeom prst="rect">
+            <a:avLst/>
+          </a:prstGeom>
+          <a:noFill/>
+        </p:spPr>
+        <p:txBody>
+          <a:bodyPr wrap="square">
+            <a:spAutoFit/>
+          </a:bodyPr>
+          <a:lstStyle/>
+          <a:p>
+            <a:pPr algn="ctr"/>
+            <a:r>
+              <a:rPr sz="2000" b="0" i="0">
+                <a:solidFill>
+                  <a:srgbClr val="828282"/>
+                </a:solidFill>
+                <a:latin typeface="Arial"/>
+              </a:rPr>
+              <a:t>賛美の日は決して終わらず</a:t>
+            </a:r>
+          </a:p>
+        </p:txBody>
+      </p:sp>
+      <p:sp>
+        <p:nvSpPr>
+          <p:cNvPr id="5" name="TextBox 4"/>
+          <p:cNvSpPr txBox="1"/>
+          <p:nvPr/>
+        </p:nvSpPr>
+        <p:spPr>
+          <a:xfrm>
+            <a:off x="640080" y="4494276"/>
+            <a:ext cx="10911535" cy="310896"/>
+          </a:xfrm>
+          <a:prstGeom prst="rect">
+            <a:avLst/>
+          </a:prstGeom>
+          <a:noFill/>
+        </p:spPr>
+        <p:txBody>
+          <a:bodyPr wrap="square">
+            <a:spAutoFit/>
+          </a:bodyPr>
+          <a:lstStyle/>
+          <a:p>
+            <a:pPr algn="ctr"/>
+            <a:r>
+              <a:rPr sz="2000" b="0" i="0">
+                <a:solidFill>
+                  <a:srgbClr val="828282"/>
+                </a:solidFill>
+                <a:latin typeface="Arial"/>
+              </a:rPr>
+              <a:t>神をほめたたえるだろう</a:t>
+            </a:r>
+          </a:p>
+        </p:txBody>
+      </p:sp>
     </p:spTree>
   </p:cSld>
   <p:clrMapOvr>
@@ -4409,6 +4619,76 @@
           </a:p>
         </p:txBody>
       </p:sp>
+      <p:sp>
+        <p:nvSpPr>
+          <p:cNvPr id="4" name="TextBox 3"/>
+          <p:cNvSpPr txBox="1"/>
+          <p:nvPr/>
+        </p:nvSpPr>
+        <p:spPr>
+          <a:xfrm>
+            <a:off x="640080" y="4128516"/>
+            <a:ext cx="10911535" cy="310896"/>
+          </a:xfrm>
+          <a:prstGeom prst="rect">
+            <a:avLst/>
+          </a:prstGeom>
+          <a:noFill/>
+        </p:spPr>
+        <p:txBody>
+          <a:bodyPr wrap="square">
+            <a:spAutoFit/>
+          </a:bodyPr>
+          <a:lstStyle/>
+          <a:p>
+            <a:pPr algn="ctr"/>
+            <a:r>
+              <a:rPr sz="2000" b="0" i="0">
+                <a:solidFill>
+                  <a:srgbClr val="828282"/>
+                </a:solidFill>
+                <a:latin typeface="Arial"/>
+              </a:rPr>
+              <a:t>素晴らしき恵みよ、一人の罪人を</a:t>
+            </a:r>
+          </a:p>
+        </p:txBody>
+      </p:sp>
+      <p:sp>
+        <p:nvSpPr>
+          <p:cNvPr id="5" name="TextBox 4"/>
+          <p:cNvSpPr txBox="1"/>
+          <p:nvPr/>
+        </p:nvSpPr>
+        <p:spPr>
+          <a:xfrm>
+            <a:off x="640080" y="4494276"/>
+            <a:ext cx="10911535" cy="310896"/>
+          </a:xfrm>
+          <a:prstGeom prst="rect">
+            <a:avLst/>
+          </a:prstGeom>
+          <a:noFill/>
+        </p:spPr>
+        <p:txBody>
+          <a:bodyPr wrap="square">
+            <a:spAutoFit/>
+          </a:bodyPr>
+          <a:lstStyle/>
+          <a:p>
+            <a:pPr algn="ctr"/>
+            <a:r>
+              <a:rPr sz="2000" b="0" i="0">
+                <a:solidFill>
+                  <a:srgbClr val="828282"/>
+                </a:solidFill>
+                <a:latin typeface="Arial"/>
+              </a:rPr>
+              <a:t>私のような者を、イエスは救った</a:t>
+            </a:r>
+          </a:p>
+        </p:txBody>
+      </p:sp>
     </p:spTree>
   </p:cSld>
   <p:clrMapOvr>
@@ -4505,6 +4785,76 @@
           </a:p>
         </p:txBody>
       </p:sp>
+      <p:sp>
+        <p:nvSpPr>
+          <p:cNvPr id="4" name="TextBox 3"/>
+          <p:cNvSpPr txBox="1"/>
+          <p:nvPr/>
+        </p:nvSpPr>
+        <p:spPr>
+          <a:xfrm>
+            <a:off x="640080" y="4128516"/>
+            <a:ext cx="10911535" cy="310896"/>
+          </a:xfrm>
+          <a:prstGeom prst="rect">
+            <a:avLst/>
+          </a:prstGeom>
+          <a:noFill/>
+        </p:spPr>
+        <p:txBody>
+          <a:bodyPr wrap="square">
+            <a:spAutoFit/>
+          </a:bodyPr>
+          <a:lstStyle/>
+          <a:p>
+            <a:pPr algn="ctr"/>
+            <a:r>
+              <a:rPr sz="2000" b="0" i="0">
+                <a:solidFill>
+                  <a:srgbClr val="828282"/>
+                </a:solidFill>
+                <a:latin typeface="Arial"/>
+              </a:rPr>
+              <a:t>迷っていた私を見つけてくださった</a:t>
+            </a:r>
+          </a:p>
+        </p:txBody>
+      </p:sp>
+      <p:sp>
+        <p:nvSpPr>
+          <p:cNvPr id="5" name="TextBox 4"/>
+          <p:cNvSpPr txBox="1"/>
+          <p:nvPr/>
+        </p:nvSpPr>
+        <p:spPr>
+          <a:xfrm>
+            <a:off x="640080" y="4494276"/>
+            <a:ext cx="10911535" cy="310896"/>
+          </a:xfrm>
+          <a:prstGeom prst="rect">
+            <a:avLst/>
+          </a:prstGeom>
+          <a:noFill/>
+        </p:spPr>
+        <p:txBody>
+          <a:bodyPr wrap="square">
+            <a:spAutoFit/>
+          </a:bodyPr>
+          <a:lstStyle/>
+          <a:p>
+            <a:pPr algn="ctr"/>
+            <a:r>
+              <a:rPr sz="2000" b="0" i="0">
+                <a:solidFill>
+                  <a:srgbClr val="828282"/>
+                </a:solidFill>
+                <a:latin typeface="Arial"/>
+              </a:rPr>
+              <a:t>盲目だったが、今は見える</a:t>
+            </a:r>
+          </a:p>
+        </p:txBody>
+      </p:sp>
     </p:spTree>
   </p:cSld>
   <p:clrMapOvr>
@@ -4929,6 +5279,76 @@
                 <a:latin typeface="Arial"/>
               </a:rPr>
               <a:t>Já tenho chegado até aqui</a:t>
+            </a:r>
+          </a:p>
+        </p:txBody>
+      </p:sp>
+      <p:sp>
+        <p:nvSpPr>
+          <p:cNvPr id="4" name="TextBox 3"/>
+          <p:cNvSpPr txBox="1"/>
+          <p:nvPr/>
+        </p:nvSpPr>
+        <p:spPr>
+          <a:xfrm>
+            <a:off x="640080" y="4128516"/>
+            <a:ext cx="10911535" cy="310896"/>
+          </a:xfrm>
+          <a:prstGeom prst="rect">
+            <a:avLst/>
+          </a:prstGeom>
+          <a:noFill/>
+        </p:spPr>
+        <p:txBody>
+          <a:bodyPr wrap="square">
+            <a:spAutoFit/>
+          </a:bodyPr>
+          <a:lstStyle/>
+          <a:p>
+            <a:pPr algn="ctr"/>
+            <a:r>
+              <a:rPr sz="2000" b="0" i="0">
+                <a:solidFill>
+                  <a:srgbClr val="828282"/>
+                </a:solidFill>
+                <a:latin typeface="Arial"/>
+              </a:rPr>
+              <a:t>多くの危険、労苦、罠を通り抜けて</a:t>
+            </a:r>
+          </a:p>
+        </p:txBody>
+      </p:sp>
+      <p:sp>
+        <p:nvSpPr>
+          <p:cNvPr id="5" name="TextBox 4"/>
+          <p:cNvSpPr txBox="1"/>
+          <p:nvPr/>
+        </p:nvSpPr>
+        <p:spPr>
+          <a:xfrm>
+            <a:off x="640080" y="4494276"/>
+            <a:ext cx="10911535" cy="310896"/>
+          </a:xfrm>
+          <a:prstGeom prst="rect">
+            <a:avLst/>
+          </a:prstGeom>
+          <a:noFill/>
+        </p:spPr>
+        <p:txBody>
+          <a:bodyPr wrap="square">
+            <a:spAutoFit/>
+          </a:bodyPr>
+          <a:lstStyle/>
+          <a:p>
+            <a:pPr algn="ctr"/>
+            <a:r>
+              <a:rPr sz="2000" b="0" i="0">
+                <a:solidFill>
+                  <a:srgbClr val="828282"/>
+                </a:solidFill>
+                <a:latin typeface="Arial"/>
+              </a:rPr>
+              <a:t>ここまでたどり着いた</a:t>
             </a:r>
           </a:p>
         </p:txBody>
